--- a/business-analyst/business_analyst_presentation.pptx
+++ b/business-analyst/business_analyst_presentation.pptx
@@ -579,12 +579,17 @@
           </a:p>
           <a:p>
             <a:r>
-              <a:t>Оригинал определения: «Business Analysis is the practice of enabling change in an organizational context, by defining needs and recommending solutions that deliver value to stakeholders».</a:t>
-            </a:r>
-          </a:p>
-          <a:p>
-            <a:r>
-              <a:t>Нюанс на вопрос «определение про практику, а не про человека»: по IIBA к деятельности бизнес-анализа относятся не только BA, но и системные аналитики, специалисты по требованиям, process analyst'ы, product owner'ы. Поэтому определение IIBA — самое широкое.</a:t>
+              <a:t>Оригинал определения аналитика (IIBA, BABOK Glossary): «A business analyst is any person who performs business analysis, no matter their job title or organizational role». По Core Standard аналитик: «understanding enterprise problems and goals, analyzing needs and solutions, devising strategies, driving change, and facilitating stakeholder collaboration».</a:t>
+            </a:r>
+          </a:p>
+          <a:p>
+            <a:r>
+              <a:t>Оригинал определения практики (IIBA): «Business Analysis is the practice of enabling change in an organizational context, by defining needs and recommending solutions that deliver value to stakeholders».</a:t>
+            </a:r>
+          </a:p>
+          <a:p>
+            <a:r>
+              <a:t>Если спросят «определение про практику, а не про человека»: у IIBA есть ОБА определения — и бизнес-анализа (практики), и бизнес-аналитика (человека). В слайд взято определение про человека — по теме задания; ширину показывает практика: к ней IIBA относит не только BA, но и системных аналитиков, product owner'ов, специалистов по требованиям.</a:t>
             </a:r>
           </a:p>
           <a:p>
@@ -5173,7 +5178,7 @@
                 <a:cs typeface="Segoe UI"/>
                 <a:ea typeface="Segoe UI"/>
               </a:rPr>
-              <a:t>Бизнес-анализ — практика определения потребностей и рекомендации решений, которые позволяют осуществлять изменения и создавать ценность для заинтересованных сторон.</a:t>
+              <a:t>Бизнес-аналитик — специалист, который выполняет задачи бизнес-анализа, независимо от должности и роли: определяет потребности заинтересованных сторон, анализирует информацию из разных источников и рекомендует решения, создающие ценность.</a:t>
             </a:r>
           </a:p>
         </p:txBody>
@@ -5225,7 +5230,7 @@
                 <a:cs typeface="Segoe UI"/>
                 <a:ea typeface="Segoe UI"/>
               </a:rPr>
-              <a:t>IIBA, The Business Analysis Standard</a:t>
+              <a:t>IIBA, BABOK Guide, глоссарий: business analyst</a:t>
             </a:r>
           </a:p>
         </p:txBody>

--- a/business-analyst/business_analyst_presentation.pptx
+++ b/business-analyst/business_analyst_presentation.pptx
@@ -4506,8 +4506,8 @@
         </p:nvSpPr>
         <p:spPr>
           <a:xfrm>
-            <a:off x="777240" y="1874519"/>
-            <a:ext cx="3529584" cy="2697480"/>
+            <a:off x="777240" y="1773936"/>
+            <a:ext cx="3529584" cy="2926080"/>
           </a:xfrm>
           <a:prstGeom prst="roundRect">
             <a:avLst>
@@ -4552,7 +4552,7 @@
         </p:nvSpPr>
         <p:spPr>
           <a:xfrm>
-            <a:off x="1051560" y="2148839"/>
+            <a:off x="1051560" y="2048255"/>
             <a:ext cx="155448" cy="155448"/>
           </a:xfrm>
           <a:prstGeom prst="ellipse">
@@ -4596,7 +4596,7 @@
         </p:nvSpPr>
         <p:spPr>
           <a:xfrm>
-            <a:off x="1307592" y="2075688"/>
+            <a:off x="1307592" y="1975104"/>
             <a:ext cx="1792224" cy="329184"/>
           </a:xfrm>
           <a:prstGeom prst="rect">
@@ -4637,8 +4637,8 @@
         </p:nvSpPr>
         <p:spPr>
           <a:xfrm>
-            <a:off x="1051560" y="2551176"/>
-            <a:ext cx="2980944" cy="1371600"/>
+            <a:off x="1033271" y="2359152"/>
+            <a:ext cx="3017520" cy="1874519"/>
           </a:xfrm>
           <a:prstGeom prst="rect">
             <a:avLst/>
@@ -4657,7 +4657,7 @@
               </a:lnSpc>
             </a:pPr>
             <a:r>
-              <a:rPr sz="1250" b="0" i="0">
+              <a:rPr sz="1200" b="0" i="0">
                 <a:solidFill>
                   <a:srgbClr val="3A4258"/>
                 </a:solidFill>
@@ -4678,8 +4678,8 @@
         </p:nvSpPr>
         <p:spPr>
           <a:xfrm>
-            <a:off x="1051560" y="4133087"/>
-            <a:ext cx="2980944" cy="329184"/>
+            <a:off x="1033271" y="4297680"/>
+            <a:ext cx="3017520" cy="384048"/>
           </a:xfrm>
           <a:prstGeom prst="rect">
             <a:avLst/>
@@ -4730,8 +4730,8 @@
         </p:nvSpPr>
         <p:spPr>
           <a:xfrm>
-            <a:off x="4526279" y="1874519"/>
-            <a:ext cx="3529584" cy="2697480"/>
+            <a:off x="4526279" y="1773936"/>
+            <a:ext cx="3529584" cy="2926080"/>
           </a:xfrm>
           <a:prstGeom prst="roundRect">
             <a:avLst>
@@ -4776,7 +4776,7 @@
         </p:nvSpPr>
         <p:spPr>
           <a:xfrm>
-            <a:off x="4800599" y="2148839"/>
+            <a:off x="4800599" y="2048255"/>
             <a:ext cx="155448" cy="155448"/>
           </a:xfrm>
           <a:prstGeom prst="ellipse">
@@ -4820,7 +4820,7 @@
         </p:nvSpPr>
         <p:spPr>
           <a:xfrm>
-            <a:off x="5056631" y="2075688"/>
+            <a:off x="5056631" y="1975104"/>
             <a:ext cx="1792224" cy="329184"/>
           </a:xfrm>
           <a:prstGeom prst="rect">
@@ -4861,8 +4861,8 @@
         </p:nvSpPr>
         <p:spPr>
           <a:xfrm>
-            <a:off x="4800599" y="2551176"/>
-            <a:ext cx="2980944" cy="1371600"/>
+            <a:off x="4782312" y="2359152"/>
+            <a:ext cx="3017520" cy="1874519"/>
           </a:xfrm>
           <a:prstGeom prst="rect">
             <a:avLst/>
@@ -4881,7 +4881,7 @@
               </a:lnSpc>
             </a:pPr>
             <a:r>
-              <a:rPr sz="1250" b="0" i="0">
+              <a:rPr sz="1200" b="0" i="0">
                 <a:solidFill>
                   <a:srgbClr val="3A4258"/>
                 </a:solidFill>
@@ -4902,8 +4902,8 @@
         </p:nvSpPr>
         <p:spPr>
           <a:xfrm>
-            <a:off x="4800599" y="4133087"/>
-            <a:ext cx="2980944" cy="329184"/>
+            <a:off x="4782312" y="4297680"/>
+            <a:ext cx="3017520" cy="384048"/>
           </a:xfrm>
           <a:prstGeom prst="rect">
             <a:avLst/>
@@ -4954,8 +4954,8 @@
         </p:nvSpPr>
         <p:spPr>
           <a:xfrm>
-            <a:off x="8275319" y="1874519"/>
-            <a:ext cx="3529584" cy="2697480"/>
+            <a:off x="8275319" y="1773936"/>
+            <a:ext cx="3529584" cy="2926080"/>
           </a:xfrm>
           <a:prstGeom prst="roundRect">
             <a:avLst>
@@ -5008,7 +5008,7 @@
         </p:nvSpPr>
         <p:spPr>
           <a:xfrm>
-            <a:off x="8549640" y="2148839"/>
+            <a:off x="8549640" y="2048255"/>
             <a:ext cx="155448" cy="155448"/>
           </a:xfrm>
           <a:prstGeom prst="ellipse">
@@ -5052,7 +5052,7 @@
         </p:nvSpPr>
         <p:spPr>
           <a:xfrm>
-            <a:off x="8805672" y="2075688"/>
+            <a:off x="8805672" y="1975104"/>
             <a:ext cx="1792224" cy="329184"/>
           </a:xfrm>
           <a:prstGeom prst="rect">
@@ -5093,7 +5093,7 @@
         </p:nvSpPr>
         <p:spPr>
           <a:xfrm>
-            <a:off x="10021824" y="2093976"/>
+            <a:off x="10021824" y="1993391"/>
             <a:ext cx="1508760" cy="292608"/>
           </a:xfrm>
           <a:prstGeom prst="roundRect">
@@ -5150,8 +5150,8 @@
         </p:nvSpPr>
         <p:spPr>
           <a:xfrm>
-            <a:off x="8549640" y="2551176"/>
-            <a:ext cx="2980944" cy="1371600"/>
+            <a:off x="8531351" y="2359152"/>
+            <a:ext cx="3017520" cy="1874519"/>
           </a:xfrm>
           <a:prstGeom prst="rect">
             <a:avLst/>
@@ -5170,7 +5170,7 @@
               </a:lnSpc>
             </a:pPr>
             <a:r>
-              <a:rPr sz="1250" b="0" i="0">
+              <a:rPr sz="1200" b="0" i="0">
                 <a:solidFill>
                   <a:srgbClr val="FFFFFF"/>
                 </a:solidFill>
@@ -5191,8 +5191,8 @@
         </p:nvSpPr>
         <p:spPr>
           <a:xfrm>
-            <a:off x="8549640" y="4133087"/>
-            <a:ext cx="2980944" cy="329184"/>
+            <a:off x="8531351" y="4297680"/>
+            <a:ext cx="3017520" cy="384048"/>
           </a:xfrm>
           <a:prstGeom prst="rect">
             <a:avLst/>
@@ -7823,8 +7823,8 @@
         </p:nvSpPr>
         <p:spPr>
           <a:xfrm>
-            <a:off x="777240" y="6382512"/>
-            <a:ext cx="10637215" cy="365760"/>
+            <a:off x="777240" y="6327648"/>
+            <a:ext cx="10637215" cy="457200"/>
           </a:xfrm>
           <a:prstGeom prst="rect">
             <a:avLst/>
@@ -7839,14 +7839,14 @@
           <a:p>
             <a:pPr algn="l">
               <a:lnSpc>
-                <a:spcPct val="112000"/>
+                <a:spcPct val="108000"/>
               </a:lnSpc>
               <a:spcAft>
-                <a:spcPts val="200"/>
+                <a:spcPts val="100"/>
               </a:spcAft>
             </a:pPr>
             <a:r>
-              <a:rPr sz="850" b="0" i="1">
+              <a:rPr sz="800" b="0" i="1">
                 <a:solidFill>
                   <a:srgbClr val="8B93AD"/>
                 </a:solidFill>
@@ -7854,20 +7854,20 @@
                 <a:cs typeface="Segoe UI"/>
                 <a:ea typeface="Segoe UI"/>
               </a:rPr>
-              <a:t>✓ — дословно в вакансии,  △ — подразумевается связанным требованием. Яндекс: данные из двух вакансий (6974 — основные требования, 20167 — моделирование процессов и BPMN). Не каждая конкретная вакансия содержит все шесть пунктов.</a:t>
+              <a:t>✓ — дословно в вакансии; △ — подразумевается связанным требованием. Не каждая вакансия содержит все 6 пунктов; по Яндексу — две вакансии (6974, 20167).</a:t>
             </a:r>
           </a:p>
           <a:p>
             <a:pPr algn="l">
               <a:lnSpc>
-                <a:spcPct val="112000"/>
+                <a:spcPct val="108000"/>
               </a:lnSpc>
               <a:spcAft>
-                <a:spcPts val="200"/>
+                <a:spcPts val="100"/>
               </a:spcAft>
             </a:pPr>
             <a:r>
-              <a:rPr sz="850" b="0" i="0">
+              <a:rPr sz="800" b="0" i="0">
                 <a:solidFill>
                   <a:srgbClr val="8B93AD"/>
                 </a:solidFill>
